--- a/public/course-materials/pptx/Module-09-Envoyer-recevoir-comprendre-les-réseaux.pptx
+++ b/public/course-materials/pptx/Module-09-Envoyer-recevoir-comprendre-les-réseaux.pptx
@@ -3705,7 +3705,7 @@
     <p:bg>
       <p:bgPr>
         <a:solidFill>
-          <a:srgbClr val="0F1419"/>
+          <a:srgbClr val="0F1214"/>
         </a:solidFill>
       </p:bgPr>
     </p:bg>
@@ -3738,7 +3738,7 @@
             <a:avLst/>
           </a:prstGeom>
           <a:solidFill>
-            <a:srgbClr val="6366F1">
+            <a:srgbClr val="3B968F">
               <a:alpha val="8000"/>
             </a:srgbClr>
           </a:solidFill>
@@ -3760,7 +3760,7 @@
             <a:avLst/>
           </a:prstGeom>
           <a:solidFill>
-            <a:srgbClr val="6366F1">
+            <a:srgbClr val="3B968F">
               <a:alpha val="5000"/>
             </a:srgbClr>
           </a:solidFill>
@@ -3782,7 +3782,7 @@
             <a:avLst/>
           </a:prstGeom>
           <a:solidFill>
-            <a:srgbClr val="6366F1"/>
+            <a:srgbClr val="3B968F"/>
           </a:solidFill>
           <a:ln/>
         </p:spPr>
@@ -3838,7 +3838,7 @@
             <a:r>
               <a:rPr lang="en-US" sz="1300" b="1" spc="400" kern="0" dirty="0">
                 <a:solidFill>
-                  <a:srgbClr val="6366F1"/>
+                  <a:srgbClr val="3B968F"/>
                 </a:solidFill>
                 <a:latin typeface="Calibri" pitchFamily="34" charset="0"/>
                 <a:ea typeface="Calibri" pitchFamily="34" charset="-122"/>
@@ -3904,7 +3904,7 @@
             <a:avLst/>
           </a:prstGeom>
           <a:solidFill>
-            <a:srgbClr val="6366F1"/>
+            <a:srgbClr val="3B968F"/>
           </a:solidFill>
           <a:ln/>
         </p:spPr>
@@ -3936,7 +3936,7 @@
             <a:r>
               <a:rPr lang="en-US" sz="1100" spc="300" kern="0" dirty="0">
                 <a:solidFill>
-                  <a:srgbClr val="64748B"/>
+                  <a:srgbClr val="5B6672"/>
                 </a:solidFill>
                 <a:latin typeface="Calibri" pitchFamily="34" charset="0"/>
                 <a:ea typeface="Calibri" pitchFamily="34" charset="-122"/>
@@ -3975,7 +3975,7 @@
             <a:r>
               <a:rPr lang="en-US" sz="1100" dirty="0">
                 <a:solidFill>
-                  <a:srgbClr val="94A3B8"/>
+                  <a:srgbClr val="8994A0"/>
                 </a:solidFill>
                 <a:latin typeface="Calibri" pitchFamily="34" charset="0"/>
                 <a:ea typeface="Calibri" pitchFamily="34" charset="-122"/>
@@ -4001,7 +4001,7 @@
     <p:bg>
       <p:bgPr>
         <a:solidFill>
-          <a:srgbClr val="0F1419"/>
+          <a:srgbClr val="0F1214"/>
         </a:solidFill>
       </p:bgPr>
     </p:bg>
@@ -4034,7 +4034,7 @@
             <a:avLst/>
           </a:prstGeom>
           <a:solidFill>
-            <a:srgbClr val="6366F1">
+            <a:srgbClr val="3B968F">
               <a:alpha val="12000"/>
             </a:srgbClr>
           </a:solidFill>
@@ -4092,7 +4092,7 @@
             <a:r>
               <a:rPr lang="en-US" sz="2000" b="1" dirty="0">
                 <a:solidFill>
-                  <a:srgbClr val="6366F1"/>
+                  <a:srgbClr val="3B968F"/>
                 </a:solidFill>
                 <a:latin typeface="Calibri" pitchFamily="34" charset="0"/>
                 <a:ea typeface="Calibri" pitchFamily="34" charset="-122"/>
@@ -4237,7 +4237,7 @@
             <a:r>
               <a:rPr lang="en-US" sz="900" dirty="0">
                 <a:solidFill>
-                  <a:srgbClr val="64748B"/>
+                  <a:srgbClr val="5B6672"/>
                 </a:solidFill>
                 <a:latin typeface="Calibri" pitchFamily="34" charset="0"/>
                 <a:ea typeface="Calibri" pitchFamily="34" charset="-122"/>
@@ -4263,7 +4263,7 @@
     <p:bg>
       <p:bgPr>
         <a:solidFill>
-          <a:srgbClr val="0F1419"/>
+          <a:srgbClr val="0F1214"/>
         </a:solidFill>
       </p:bgPr>
     </p:bg>
@@ -4308,7 +4308,7 @@
             <a:r>
               <a:rPr lang="en-US" sz="2000" b="1" dirty="0">
                 <a:solidFill>
-                  <a:srgbClr val="6366F1"/>
+                  <a:srgbClr val="3B968F"/>
                 </a:solidFill>
                 <a:latin typeface="Calibri" pitchFamily="34" charset="0"/>
                 <a:ea typeface="Calibri" pitchFamily="34" charset="-122"/>
@@ -4401,7 +4401,7 @@
             </a:avLst>
           </a:prstGeom>
           <a:solidFill>
-            <a:srgbClr val="1A2332"/>
+            <a:srgbClr val="1A2026"/>
           </a:solidFill>
           <a:ln/>
         </p:spPr>
@@ -4483,7 +4483,7 @@
     <p:bg>
       <p:bgPr>
         <a:solidFill>
-          <a:srgbClr val="1A2332"/>
+          <a:srgbClr val="1A2026"/>
         </a:solidFill>
       </p:bgPr>
     </p:bg>
@@ -4552,7 +4552,7 @@
             <a:r>
               <a:rPr lang="en-US" sz="1200" b="1" spc="300" kern="0" dirty="0">
                 <a:solidFill>
-                  <a:srgbClr val="F59E0B"/>
+                  <a:srgbClr val="5BC1B8"/>
                 </a:solidFill>
                 <a:latin typeface="Calibri" pitchFamily="34" charset="0"/>
                 <a:ea typeface="Calibri" pitchFamily="34" charset="-122"/>
@@ -4620,7 +4620,7 @@
             </a:avLst>
           </a:prstGeom>
           <a:solidFill>
-            <a:srgbClr val="0F1419"/>
+            <a:srgbClr val="0F1214"/>
           </a:solidFill>
           <a:ln/>
         </p:spPr>
@@ -4642,7 +4642,7 @@
             </a:avLst>
           </a:prstGeom>
           <a:solidFill>
-            <a:srgbClr val="6366F1"/>
+            <a:srgbClr val="3B968F"/>
           </a:solidFill>
           <a:ln/>
         </p:spPr>
@@ -4656,7 +4656,7 @@
             <a:r>
               <a:rPr lang="en-US" sz="1500" b="1" dirty="0">
                 <a:solidFill>
-                  <a:srgbClr val="0F1419"/>
+                  <a:srgbClr val="0F1214"/>
                 </a:solidFill>
                 <a:latin typeface="Calibri" pitchFamily="34" charset="0"/>
                 <a:ea typeface="Calibri" pitchFamily="34" charset="-122"/>
@@ -4724,7 +4724,7 @@
             </a:avLst>
           </a:prstGeom>
           <a:solidFill>
-            <a:srgbClr val="0F1419"/>
+            <a:srgbClr val="0F1214"/>
           </a:solidFill>
           <a:ln/>
         </p:spPr>
@@ -4746,7 +4746,7 @@
             </a:avLst>
           </a:prstGeom>
           <a:solidFill>
-            <a:srgbClr val="6366F1"/>
+            <a:srgbClr val="3B968F"/>
           </a:solidFill>
           <a:ln/>
         </p:spPr>
@@ -4760,7 +4760,7 @@
             <a:r>
               <a:rPr lang="en-US" sz="1500" b="1" dirty="0">
                 <a:solidFill>
-                  <a:srgbClr val="0F1419"/>
+                  <a:srgbClr val="0F1214"/>
                 </a:solidFill>
                 <a:latin typeface="Calibri" pitchFamily="34" charset="0"/>
                 <a:ea typeface="Calibri" pitchFamily="34" charset="-122"/>
@@ -4828,7 +4828,7 @@
             </a:avLst>
           </a:prstGeom>
           <a:solidFill>
-            <a:srgbClr val="0F1419"/>
+            <a:srgbClr val="0F1214"/>
           </a:solidFill>
           <a:ln/>
         </p:spPr>
@@ -4850,7 +4850,7 @@
             </a:avLst>
           </a:prstGeom>
           <a:solidFill>
-            <a:srgbClr val="6366F1"/>
+            <a:srgbClr val="3B968F"/>
           </a:solidFill>
           <a:ln/>
         </p:spPr>
@@ -4864,7 +4864,7 @@
             <a:r>
               <a:rPr lang="en-US" sz="1500" b="1" dirty="0">
                 <a:solidFill>
-                  <a:srgbClr val="0F1419"/>
+                  <a:srgbClr val="0F1214"/>
                 </a:solidFill>
                 <a:latin typeface="Calibri" pitchFamily="34" charset="0"/>
                 <a:ea typeface="Calibri" pitchFamily="34" charset="-122"/>
@@ -4932,7 +4932,7 @@
             </a:avLst>
           </a:prstGeom>
           <a:solidFill>
-            <a:srgbClr val="0F1419"/>
+            <a:srgbClr val="0F1214"/>
           </a:solidFill>
           <a:ln/>
         </p:spPr>
@@ -4954,7 +4954,7 @@
             </a:avLst>
           </a:prstGeom>
           <a:solidFill>
-            <a:srgbClr val="6366F1"/>
+            <a:srgbClr val="3B968F"/>
           </a:solidFill>
           <a:ln/>
         </p:spPr>
@@ -4968,7 +4968,7 @@
             <a:r>
               <a:rPr lang="en-US" sz="1500" b="1" dirty="0">
                 <a:solidFill>
-                  <a:srgbClr val="0F1419"/>
+                  <a:srgbClr val="0F1214"/>
                 </a:solidFill>
                 <a:latin typeface="Calibri" pitchFamily="34" charset="0"/>
                 <a:ea typeface="Calibri" pitchFamily="34" charset="-122"/>
@@ -5036,7 +5036,7 @@
             </a:avLst>
           </a:prstGeom>
           <a:solidFill>
-            <a:srgbClr val="0F1419"/>
+            <a:srgbClr val="0F1214"/>
           </a:solidFill>
           <a:ln/>
         </p:spPr>
@@ -5058,7 +5058,7 @@
             </a:avLst>
           </a:prstGeom>
           <a:solidFill>
-            <a:srgbClr val="6366F1"/>
+            <a:srgbClr val="3B968F"/>
           </a:solidFill>
           <a:ln/>
         </p:spPr>
@@ -5072,7 +5072,7 @@
             <a:r>
               <a:rPr lang="en-US" sz="1500" b="1" dirty="0">
                 <a:solidFill>
-                  <a:srgbClr val="0F1419"/>
+                  <a:srgbClr val="0F1214"/>
                 </a:solidFill>
                 <a:latin typeface="Calibri" pitchFamily="34" charset="0"/>
                 <a:ea typeface="Calibri" pitchFamily="34" charset="-122"/>
@@ -5137,7 +5137,7 @@
     <p:bg>
       <p:bgPr>
         <a:solidFill>
-          <a:srgbClr val="0F1419"/>
+          <a:srgbClr val="0F1214"/>
         </a:solidFill>
       </p:bgPr>
     </p:bg>
@@ -5172,7 +5172,7 @@
             </a:avLst>
           </a:prstGeom>
           <a:solidFill>
-            <a:srgbClr val="2D1B1B"/>
+            <a:srgbClr val="2A1414"/>
           </a:solidFill>
           <a:ln/>
         </p:spPr>
@@ -5192,7 +5192,7 @@
             <a:avLst/>
           </a:prstGeom>
           <a:solidFill>
-            <a:srgbClr val="EF4444"/>
+            <a:srgbClr val="DC2626"/>
           </a:solidFill>
           <a:ln/>
         </p:spPr>
@@ -5248,7 +5248,7 @@
             <a:r>
               <a:rPr lang="en-US" sz="1200" b="1" spc="300" kern="0" dirty="0">
                 <a:solidFill>
-                  <a:srgbClr val="EF4444"/>
+                  <a:srgbClr val="DC2626"/>
                 </a:solidFill>
                 <a:latin typeface="Calibri" pitchFamily="34" charset="0"/>
                 <a:ea typeface="Calibri" pitchFamily="34" charset="-122"/>
@@ -5359,7 +5359,7 @@
     <p:bg>
       <p:bgPr>
         <a:solidFill>
-          <a:srgbClr val="0D2137"/>
+          <a:srgbClr val="12181D"/>
         </a:solidFill>
       </p:bgPr>
     </p:bg>
@@ -5440,7 +5440,7 @@
             <a:avLst/>
           </a:prstGeom>
           <a:solidFill>
-            <a:srgbClr val="6366F1">
+            <a:srgbClr val="3B968F">
               <a:alpha val="6000"/>
             </a:srgbClr>
           </a:solidFill>
@@ -5462,7 +5462,7 @@
             <a:avLst/>
           </a:prstGeom>
           <a:solidFill>
-            <a:srgbClr val="6366F1"/>
+            <a:srgbClr val="3B968F"/>
           </a:solidFill>
           <a:ln/>
         </p:spPr>
@@ -5494,7 +5494,7 @@
             <a:r>
               <a:rPr lang="en-US" sz="1200" b="1" spc="200" kern="0" dirty="0">
                 <a:solidFill>
-                  <a:srgbClr val="6366F1"/>
+                  <a:srgbClr val="3B968F"/>
                 </a:solidFill>
                 <a:latin typeface="Calibri" pitchFamily="34" charset="0"/>
                 <a:ea typeface="Calibri" pitchFamily="34" charset="-122"/>
@@ -5572,7 +5572,7 @@
             <a:r>
               <a:rPr lang="en-US" sz="1100" dirty="0">
                 <a:solidFill>
-                  <a:srgbClr val="64748B"/>
+                  <a:srgbClr val="5B6672"/>
                 </a:solidFill>
                 <a:latin typeface="Calibri" pitchFamily="34" charset="0"/>
                 <a:ea typeface="Calibri" pitchFamily="34" charset="-122"/>
@@ -5598,7 +5598,7 @@
     <p:bg>
       <p:bgPr>
         <a:solidFill>
-          <a:srgbClr val="0F1419"/>
+          <a:srgbClr val="0F1214"/>
         </a:solidFill>
       </p:bgPr>
     </p:bg>
@@ -5631,7 +5631,7 @@
             <a:avLst/>
           </a:prstGeom>
           <a:solidFill>
-            <a:srgbClr val="6366F1">
+            <a:srgbClr val="3B968F">
               <a:alpha val="12000"/>
             </a:srgbClr>
           </a:solidFill>
@@ -5753,7 +5753,7 @@
             <a:r>
               <a:rPr lang="en-US" sz="900" dirty="0">
                 <a:solidFill>
-                  <a:srgbClr val="64748B"/>
+                  <a:srgbClr val="5B6672"/>
                 </a:solidFill>
                 <a:latin typeface="Calibri" pitchFamily="34" charset="0"/>
                 <a:ea typeface="Calibri" pitchFamily="34" charset="-122"/>
@@ -5779,7 +5779,7 @@
     <p:bg>
       <p:bgPr>
         <a:solidFill>
-          <a:srgbClr val="0F1419"/>
+          <a:srgbClr val="0F1214"/>
         </a:solidFill>
       </p:bgPr>
     </p:bg>
@@ -5824,7 +5824,7 @@
             <a:r>
               <a:rPr lang="en-US" sz="2000" b="1" dirty="0">
                 <a:solidFill>
-                  <a:srgbClr val="6366F1"/>
+                  <a:srgbClr val="3B968F"/>
                 </a:solidFill>
                 <a:latin typeface="Calibri" pitchFamily="34" charset="0"/>
                 <a:ea typeface="Calibri" pitchFamily="34" charset="-122"/>
@@ -5938,7 +5938,7 @@
             </a:avLst>
           </a:prstGeom>
           <a:solidFill>
-            <a:srgbClr val="1A2332"/>
+            <a:srgbClr val="1A2026"/>
           </a:solidFill>
           <a:ln/>
         </p:spPr>
@@ -6023,7 +6023,7 @@
             </a:avLst>
           </a:prstGeom>
           <a:solidFill>
-            <a:srgbClr val="1A2332"/>
+            <a:srgbClr val="1A2026"/>
           </a:solidFill>
           <a:ln/>
         </p:spPr>
@@ -6105,7 +6105,7 @@
     <p:bg>
       <p:bgPr>
         <a:solidFill>
-          <a:srgbClr val="0F1419"/>
+          <a:srgbClr val="0F1214"/>
         </a:solidFill>
       </p:bgPr>
     </p:bg>
@@ -6138,7 +6138,7 @@
             <a:avLst/>
           </a:prstGeom>
           <a:solidFill>
-            <a:srgbClr val="6366F1">
+            <a:srgbClr val="3B968F">
               <a:alpha val="12000"/>
             </a:srgbClr>
           </a:solidFill>
@@ -6196,7 +6196,7 @@
             <a:r>
               <a:rPr lang="en-US" sz="2000" b="1" dirty="0">
                 <a:solidFill>
-                  <a:srgbClr val="6366F1"/>
+                  <a:srgbClr val="3B968F"/>
                 </a:solidFill>
                 <a:latin typeface="Calibri" pitchFamily="34" charset="0"/>
                 <a:ea typeface="Calibri" pitchFamily="34" charset="-122"/>
@@ -6404,7 +6404,7 @@
             <a:r>
               <a:rPr lang="en-US" sz="900" dirty="0">
                 <a:solidFill>
-                  <a:srgbClr val="64748B"/>
+                  <a:srgbClr val="5B6672"/>
                 </a:solidFill>
                 <a:latin typeface="Calibri" pitchFamily="34" charset="0"/>
                 <a:ea typeface="Calibri" pitchFamily="34" charset="-122"/>
@@ -6430,7 +6430,7 @@
     <p:bg>
       <p:bgPr>
         <a:solidFill>
-          <a:srgbClr val="0F1419"/>
+          <a:srgbClr val="0F1214"/>
         </a:solidFill>
       </p:bgPr>
     </p:bg>
@@ -6463,7 +6463,7 @@
             <a:avLst/>
           </a:prstGeom>
           <a:solidFill>
-            <a:srgbClr val="6366F1">
+            <a:srgbClr val="3B968F">
               <a:alpha val="12000"/>
             </a:srgbClr>
           </a:solidFill>
@@ -6521,7 +6521,7 @@
             <a:r>
               <a:rPr lang="en-US" sz="2000" b="1" dirty="0">
                 <a:solidFill>
-                  <a:srgbClr val="6366F1"/>
+                  <a:srgbClr val="3B968F"/>
                 </a:solidFill>
                 <a:latin typeface="Calibri" pitchFamily="34" charset="0"/>
                 <a:ea typeface="Calibri" pitchFamily="34" charset="-122"/>
@@ -6666,7 +6666,7 @@
             <a:r>
               <a:rPr lang="en-US" sz="900" dirty="0">
                 <a:solidFill>
-                  <a:srgbClr val="64748B"/>
+                  <a:srgbClr val="5B6672"/>
                 </a:solidFill>
                 <a:latin typeface="Calibri" pitchFamily="34" charset="0"/>
                 <a:ea typeface="Calibri" pitchFamily="34" charset="-122"/>
@@ -6692,7 +6692,7 @@
     <p:bg>
       <p:bgPr>
         <a:solidFill>
-          <a:srgbClr val="0F1419"/>
+          <a:srgbClr val="0F1214"/>
         </a:solidFill>
       </p:bgPr>
     </p:bg>
@@ -6737,7 +6737,7 @@
             <a:r>
               <a:rPr lang="en-US" sz="2000" b="1" dirty="0">
                 <a:solidFill>
-                  <a:srgbClr val="6366F1"/>
+                  <a:srgbClr val="3B968F"/>
                 </a:solidFill>
                 <a:latin typeface="Calibri" pitchFamily="34" charset="0"/>
                 <a:ea typeface="Calibri" pitchFamily="34" charset="-122"/>
@@ -6830,7 +6830,7 @@
             </a:avLst>
           </a:prstGeom>
           <a:solidFill>
-            <a:srgbClr val="1A2332"/>
+            <a:srgbClr val="1A2026"/>
           </a:solidFill>
           <a:ln/>
         </p:spPr>
@@ -6915,7 +6915,7 @@
             </a:avLst>
           </a:prstGeom>
           <a:solidFill>
-            <a:srgbClr val="1A2332"/>
+            <a:srgbClr val="1A2026"/>
           </a:solidFill>
           <a:ln/>
         </p:spPr>
@@ -6997,7 +6997,7 @@
     <p:bg>
       <p:bgPr>
         <a:solidFill>
-          <a:srgbClr val="0F1419"/>
+          <a:srgbClr val="0F1214"/>
         </a:solidFill>
       </p:bgPr>
     </p:bg>
@@ -7042,7 +7042,7 @@
             <a:r>
               <a:rPr lang="en-US" sz="1200" b="1" spc="300" kern="0" dirty="0">
                 <a:solidFill>
-                  <a:srgbClr val="6366F1"/>
+                  <a:srgbClr val="3B968F"/>
                 </a:solidFill>
                 <a:latin typeface="Calibri" pitchFamily="34" charset="0"/>
                 <a:ea typeface="Calibri" pitchFamily="34" charset="-122"/>
@@ -7110,7 +7110,7 @@
             </a:avLst>
           </a:prstGeom>
           <a:solidFill>
-            <a:srgbClr val="1A2332"/>
+            <a:srgbClr val="1A2026"/>
           </a:solidFill>
           <a:ln/>
         </p:spPr>
@@ -7142,7 +7142,7 @@
             <a:r>
               <a:rPr lang="en-US" sz="1300" b="1" dirty="0">
                 <a:solidFill>
-                  <a:srgbClr val="6366F1"/>
+                  <a:srgbClr val="3B968F"/>
                 </a:solidFill>
                 <a:latin typeface="Calibri" pitchFamily="34" charset="0"/>
                 <a:ea typeface="Calibri" pitchFamily="34" charset="-122"/>
@@ -7234,7 +7234,7 @@
             </a:avLst>
           </a:prstGeom>
           <a:solidFill>
-            <a:srgbClr val="1A2332"/>
+            <a:srgbClr val="1A2026"/>
           </a:solidFill>
           <a:ln/>
         </p:spPr>
@@ -7266,7 +7266,7 @@
             <a:r>
               <a:rPr lang="en-US" sz="1300" b="1" dirty="0">
                 <a:solidFill>
-                  <a:srgbClr val="6366F1"/>
+                  <a:srgbClr val="3B968F"/>
                 </a:solidFill>
                 <a:latin typeface="Calibri" pitchFamily="34" charset="0"/>
                 <a:ea typeface="Calibri" pitchFamily="34" charset="-122"/>
@@ -7358,7 +7358,7 @@
             </a:avLst>
           </a:prstGeom>
           <a:solidFill>
-            <a:srgbClr val="1A2332"/>
+            <a:srgbClr val="1A2026"/>
           </a:solidFill>
           <a:ln/>
         </p:spPr>
@@ -7390,7 +7390,7 @@
             <a:r>
               <a:rPr lang="en-US" sz="1300" b="1" dirty="0">
                 <a:solidFill>
-                  <a:srgbClr val="6366F1"/>
+                  <a:srgbClr val="3B968F"/>
                 </a:solidFill>
                 <a:latin typeface="Calibri" pitchFamily="34" charset="0"/>
                 <a:ea typeface="Calibri" pitchFamily="34" charset="-122"/>
@@ -7479,7 +7479,7 @@
     <p:bg>
       <p:bgPr>
         <a:solidFill>
-          <a:srgbClr val="0F1419"/>
+          <a:srgbClr val="0F1214"/>
         </a:solidFill>
       </p:bgPr>
     </p:bg>
@@ -7512,7 +7512,7 @@
             <a:avLst/>
           </a:prstGeom>
           <a:solidFill>
-            <a:srgbClr val="6366F1">
+            <a:srgbClr val="3B968F">
               <a:alpha val="12000"/>
             </a:srgbClr>
           </a:solidFill>
@@ -7570,7 +7570,7 @@
             <a:r>
               <a:rPr lang="en-US" sz="2000" b="1" dirty="0">
                 <a:solidFill>
-                  <a:srgbClr val="6366F1"/>
+                  <a:srgbClr val="3B968F"/>
                 </a:solidFill>
                 <a:latin typeface="Calibri" pitchFamily="34" charset="0"/>
                 <a:ea typeface="Calibri" pitchFamily="34" charset="-122"/>
@@ -7673,7 +7673,7 @@
             <a:r>
               <a:rPr lang="en-US" sz="900" dirty="0">
                 <a:solidFill>
-                  <a:srgbClr val="64748B"/>
+                  <a:srgbClr val="5B6672"/>
                 </a:solidFill>
                 <a:latin typeface="Calibri" pitchFamily="34" charset="0"/>
                 <a:ea typeface="Calibri" pitchFamily="34" charset="-122"/>
@@ -7699,7 +7699,7 @@
     <p:bg>
       <p:bgPr>
         <a:solidFill>
-          <a:srgbClr val="1A2332"/>
+          <a:srgbClr val="1A2026"/>
         </a:solidFill>
       </p:bgPr>
     </p:bg>
@@ -7768,7 +7768,7 @@
             <a:r>
               <a:rPr lang="en-US" sz="1200" b="1" spc="300" kern="0" dirty="0">
                 <a:solidFill>
-                  <a:srgbClr val="F59E0B"/>
+                  <a:srgbClr val="5BC1B8"/>
                 </a:solidFill>
                 <a:latin typeface="Calibri" pitchFamily="34" charset="0"/>
                 <a:ea typeface="Calibri" pitchFamily="34" charset="-122"/>
@@ -7836,7 +7836,7 @@
             </a:avLst>
           </a:prstGeom>
           <a:solidFill>
-            <a:srgbClr val="0F1419"/>
+            <a:srgbClr val="0F1214"/>
           </a:solidFill>
           <a:ln/>
         </p:spPr>
@@ -7858,7 +7858,7 @@
             </a:avLst>
           </a:prstGeom>
           <a:solidFill>
-            <a:srgbClr val="6366F1"/>
+            <a:srgbClr val="3B968F"/>
           </a:solidFill>
           <a:ln/>
         </p:spPr>
@@ -7872,7 +7872,7 @@
             <a:r>
               <a:rPr lang="en-US" sz="1500" b="1" dirty="0">
                 <a:solidFill>
-                  <a:srgbClr val="0F1419"/>
+                  <a:srgbClr val="0F1214"/>
                 </a:solidFill>
                 <a:latin typeface="Calibri" pitchFamily="34" charset="0"/>
                 <a:ea typeface="Calibri" pitchFamily="34" charset="-122"/>
@@ -7940,7 +7940,7 @@
             </a:avLst>
           </a:prstGeom>
           <a:solidFill>
-            <a:srgbClr val="0F1419"/>
+            <a:srgbClr val="0F1214"/>
           </a:solidFill>
           <a:ln/>
         </p:spPr>
@@ -7962,7 +7962,7 @@
             </a:avLst>
           </a:prstGeom>
           <a:solidFill>
-            <a:srgbClr val="6366F1"/>
+            <a:srgbClr val="3B968F"/>
           </a:solidFill>
           <a:ln/>
         </p:spPr>
@@ -7976,7 +7976,7 @@
             <a:r>
               <a:rPr lang="en-US" sz="1500" b="1" dirty="0">
                 <a:solidFill>
-                  <a:srgbClr val="0F1419"/>
+                  <a:srgbClr val="0F1214"/>
                 </a:solidFill>
                 <a:latin typeface="Calibri" pitchFamily="34" charset="0"/>
                 <a:ea typeface="Calibri" pitchFamily="34" charset="-122"/>
@@ -8044,7 +8044,7 @@
             </a:avLst>
           </a:prstGeom>
           <a:solidFill>
-            <a:srgbClr val="0F1419"/>
+            <a:srgbClr val="0F1214"/>
           </a:solidFill>
           <a:ln/>
         </p:spPr>
@@ -8066,7 +8066,7 @@
             </a:avLst>
           </a:prstGeom>
           <a:solidFill>
-            <a:srgbClr val="6366F1"/>
+            <a:srgbClr val="3B968F"/>
           </a:solidFill>
           <a:ln/>
         </p:spPr>
@@ -8080,7 +8080,7 @@
             <a:r>
               <a:rPr lang="en-US" sz="1500" b="1" dirty="0">
                 <a:solidFill>
-                  <a:srgbClr val="0F1419"/>
+                  <a:srgbClr val="0F1214"/>
                 </a:solidFill>
                 <a:latin typeface="Calibri" pitchFamily="34" charset="0"/>
                 <a:ea typeface="Calibri" pitchFamily="34" charset="-122"/>
@@ -8148,7 +8148,7 @@
             </a:avLst>
           </a:prstGeom>
           <a:solidFill>
-            <a:srgbClr val="0F1419"/>
+            <a:srgbClr val="0F1214"/>
           </a:solidFill>
           <a:ln/>
         </p:spPr>
@@ -8170,7 +8170,7 @@
             </a:avLst>
           </a:prstGeom>
           <a:solidFill>
-            <a:srgbClr val="6366F1"/>
+            <a:srgbClr val="3B968F"/>
           </a:solidFill>
           <a:ln/>
         </p:spPr>
@@ -8184,7 +8184,7 @@
             <a:r>
               <a:rPr lang="en-US" sz="1500" b="1" dirty="0">
                 <a:solidFill>
-                  <a:srgbClr val="0F1419"/>
+                  <a:srgbClr val="0F1214"/>
                 </a:solidFill>
                 <a:latin typeface="Calibri" pitchFamily="34" charset="0"/>
                 <a:ea typeface="Calibri" pitchFamily="34" charset="-122"/>
@@ -8249,7 +8249,7 @@
     <p:bg>
       <p:bgPr>
         <a:solidFill>
-          <a:srgbClr val="0D2137"/>
+          <a:srgbClr val="12181D"/>
         </a:solidFill>
       </p:bgPr>
     </p:bg>
@@ -8330,7 +8330,7 @@
             <a:avLst/>
           </a:prstGeom>
           <a:solidFill>
-            <a:srgbClr val="6366F1">
+            <a:srgbClr val="3B968F">
               <a:alpha val="6000"/>
             </a:srgbClr>
           </a:solidFill>
@@ -8352,7 +8352,7 @@
             <a:avLst/>
           </a:prstGeom>
           <a:solidFill>
-            <a:srgbClr val="6366F1"/>
+            <a:srgbClr val="3B968F"/>
           </a:solidFill>
           <a:ln/>
         </p:spPr>
@@ -8384,7 +8384,7 @@
             <a:r>
               <a:rPr lang="en-US" sz="1200" b="1" spc="200" kern="0" dirty="0">
                 <a:solidFill>
-                  <a:srgbClr val="6366F1"/>
+                  <a:srgbClr val="3B968F"/>
                 </a:solidFill>
                 <a:latin typeface="Calibri" pitchFamily="34" charset="0"/>
                 <a:ea typeface="Calibri" pitchFamily="34" charset="-122"/>
@@ -8462,7 +8462,7 @@
             <a:r>
               <a:rPr lang="en-US" sz="1100" dirty="0">
                 <a:solidFill>
-                  <a:srgbClr val="64748B"/>
+                  <a:srgbClr val="5B6672"/>
                 </a:solidFill>
                 <a:latin typeface="Calibri" pitchFamily="34" charset="0"/>
                 <a:ea typeface="Calibri" pitchFamily="34" charset="-122"/>
@@ -8488,7 +8488,7 @@
     <p:bg>
       <p:bgPr>
         <a:solidFill>
-          <a:srgbClr val="0F1419"/>
+          <a:srgbClr val="0F1214"/>
         </a:solidFill>
       </p:bgPr>
     </p:bg>
@@ -8521,7 +8521,7 @@
             <a:avLst/>
           </a:prstGeom>
           <a:solidFill>
-            <a:srgbClr val="6366F1">
+            <a:srgbClr val="3B968F">
               <a:alpha val="12000"/>
             </a:srgbClr>
           </a:solidFill>
@@ -8685,7 +8685,7 @@
             <a:r>
               <a:rPr lang="en-US" sz="900" dirty="0">
                 <a:solidFill>
-                  <a:srgbClr val="64748B"/>
+                  <a:srgbClr val="5B6672"/>
                 </a:solidFill>
                 <a:latin typeface="Calibri" pitchFamily="34" charset="0"/>
                 <a:ea typeface="Calibri" pitchFamily="34" charset="-122"/>
@@ -8711,7 +8711,7 @@
     <p:bg>
       <p:bgPr>
         <a:solidFill>
-          <a:srgbClr val="0F1419"/>
+          <a:srgbClr val="0F1214"/>
         </a:solidFill>
       </p:bgPr>
     </p:bg>
@@ -8756,7 +8756,7 @@
             <a:r>
               <a:rPr lang="en-US" sz="2000" b="1" dirty="0">
                 <a:solidFill>
-                  <a:srgbClr val="6366F1"/>
+                  <a:srgbClr val="3B968F"/>
                 </a:solidFill>
                 <a:latin typeface="Calibri" pitchFamily="34" charset="0"/>
                 <a:ea typeface="Calibri" pitchFamily="34" charset="-122"/>
@@ -8849,7 +8849,7 @@
             </a:avLst>
           </a:prstGeom>
           <a:solidFill>
-            <a:srgbClr val="1A2332"/>
+            <a:srgbClr val="1A2026"/>
           </a:solidFill>
           <a:ln/>
         </p:spPr>
@@ -8931,7 +8931,7 @@
     <p:bg>
       <p:bgPr>
         <a:solidFill>
-          <a:srgbClr val="0F1419"/>
+          <a:srgbClr val="0F1214"/>
         </a:solidFill>
       </p:bgPr>
     </p:bg>
@@ -8964,7 +8964,7 @@
             <a:avLst/>
           </a:prstGeom>
           <a:solidFill>
-            <a:srgbClr val="6366F1">
+            <a:srgbClr val="3B968F">
               <a:alpha val="12000"/>
             </a:srgbClr>
           </a:solidFill>
@@ -9022,7 +9022,7 @@
             <a:r>
               <a:rPr lang="en-US" sz="2000" b="1" dirty="0">
                 <a:solidFill>
-                  <a:srgbClr val="6366F1"/>
+                  <a:srgbClr val="3B968F"/>
                 </a:solidFill>
                 <a:latin typeface="Calibri" pitchFamily="34" charset="0"/>
                 <a:ea typeface="Calibri" pitchFamily="34" charset="-122"/>
@@ -9230,7 +9230,7 @@
             <a:r>
               <a:rPr lang="en-US" sz="900" dirty="0">
                 <a:solidFill>
-                  <a:srgbClr val="64748B"/>
+                  <a:srgbClr val="5B6672"/>
                 </a:solidFill>
                 <a:latin typeface="Calibri" pitchFamily="34" charset="0"/>
                 <a:ea typeface="Calibri" pitchFamily="34" charset="-122"/>
@@ -9256,7 +9256,7 @@
     <p:bg>
       <p:bgPr>
         <a:solidFill>
-          <a:srgbClr val="0F1419"/>
+          <a:srgbClr val="0F1214"/>
         </a:solidFill>
       </p:bgPr>
     </p:bg>
@@ -9289,7 +9289,7 @@
             <a:avLst/>
           </a:prstGeom>
           <a:solidFill>
-            <a:srgbClr val="6366F1">
+            <a:srgbClr val="3B968F">
               <a:alpha val="12000"/>
             </a:srgbClr>
           </a:solidFill>
@@ -9347,7 +9347,7 @@
             <a:r>
               <a:rPr lang="en-US" sz="2000" b="1" dirty="0">
                 <a:solidFill>
-                  <a:srgbClr val="6366F1"/>
+                  <a:srgbClr val="3B968F"/>
                 </a:solidFill>
                 <a:latin typeface="Calibri" pitchFamily="34" charset="0"/>
                 <a:ea typeface="Calibri" pitchFamily="34" charset="-122"/>
@@ -9429,7 +9429,7 @@
             <a:r>
               <a:rPr lang="en-US" sz="900" dirty="0">
                 <a:solidFill>
-                  <a:srgbClr val="64748B"/>
+                  <a:srgbClr val="5B6672"/>
                 </a:solidFill>
                 <a:latin typeface="Calibri" pitchFamily="34" charset="0"/>
                 <a:ea typeface="Calibri" pitchFamily="34" charset="-122"/>
@@ -9455,7 +9455,7 @@
     <p:bg>
       <p:bgPr>
         <a:solidFill>
-          <a:srgbClr val="0F1419"/>
+          <a:srgbClr val="0F1214"/>
         </a:solidFill>
       </p:bgPr>
     </p:bg>
@@ -9488,7 +9488,7 @@
             <a:avLst/>
           </a:prstGeom>
           <a:solidFill>
-            <a:srgbClr val="6366F1">
+            <a:srgbClr val="3B968F">
               <a:alpha val="12000"/>
             </a:srgbClr>
           </a:solidFill>
@@ -9546,7 +9546,7 @@
             <a:r>
               <a:rPr lang="en-US" sz="2000" b="1" dirty="0">
                 <a:solidFill>
-                  <a:srgbClr val="6366F1"/>
+                  <a:srgbClr val="3B968F"/>
                 </a:solidFill>
                 <a:latin typeface="Calibri" pitchFamily="34" charset="0"/>
                 <a:ea typeface="Calibri" pitchFamily="34" charset="-122"/>
@@ -9628,7 +9628,7 @@
             <a:r>
               <a:rPr lang="en-US" sz="900" dirty="0">
                 <a:solidFill>
-                  <a:srgbClr val="64748B"/>
+                  <a:srgbClr val="5B6672"/>
                 </a:solidFill>
                 <a:latin typeface="Calibri" pitchFamily="34" charset="0"/>
                 <a:ea typeface="Calibri" pitchFamily="34" charset="-122"/>
@@ -9654,7 +9654,7 @@
     <p:bg>
       <p:bgPr>
         <a:solidFill>
-          <a:srgbClr val="0F1419"/>
+          <a:srgbClr val="0F1214"/>
         </a:solidFill>
       </p:bgPr>
     </p:bg>
@@ -9699,7 +9699,7 @@
             <a:r>
               <a:rPr lang="en-US" sz="2000" b="1" dirty="0">
                 <a:solidFill>
-                  <a:srgbClr val="6366F1"/>
+                  <a:srgbClr val="3B968F"/>
                 </a:solidFill>
                 <a:latin typeface="Calibri" pitchFamily="34" charset="0"/>
                 <a:ea typeface="Calibri" pitchFamily="34" charset="-122"/>
@@ -9728,7 +9728,7 @@
             </a:avLst>
           </a:prstGeom>
           <a:solidFill>
-            <a:srgbClr val="1A2332"/>
+            <a:srgbClr val="1A2026"/>
           </a:solidFill>
           <a:ln/>
         </p:spPr>
@@ -9813,7 +9813,7 @@
             </a:avLst>
           </a:prstGeom>
           <a:solidFill>
-            <a:srgbClr val="1A2332"/>
+            <a:srgbClr val="1A2026"/>
           </a:solidFill>
           <a:ln/>
         </p:spPr>
@@ -9898,7 +9898,7 @@
             </a:avLst>
           </a:prstGeom>
           <a:solidFill>
-            <a:srgbClr val="1A2332"/>
+            <a:srgbClr val="1A2026"/>
           </a:solidFill>
           <a:ln/>
         </p:spPr>
@@ -9983,7 +9983,7 @@
             </a:avLst>
           </a:prstGeom>
           <a:solidFill>
-            <a:srgbClr val="1A2332"/>
+            <a:srgbClr val="1A2026"/>
           </a:solidFill>
           <a:ln/>
         </p:spPr>
@@ -10078,7 +10078,7 @@
             <a:r>
               <a:rPr lang="en-US" sz="900" dirty="0">
                 <a:solidFill>
-                  <a:srgbClr val="94A3B8"/>
+                  <a:srgbClr val="8994A0"/>
                 </a:solidFill>
                 <a:latin typeface="Calibri" pitchFamily="34" charset="0"/>
                 <a:ea typeface="Calibri" pitchFamily="34" charset="-122"/>
@@ -10107,7 +10107,7 @@
             </a:avLst>
           </a:prstGeom>
           <a:solidFill>
-            <a:srgbClr val="1A2332"/>
+            <a:srgbClr val="1A2026"/>
           </a:solidFill>
           <a:ln/>
         </p:spPr>
@@ -10192,7 +10192,7 @@
             </a:avLst>
           </a:prstGeom>
           <a:solidFill>
-            <a:srgbClr val="1A2332"/>
+            <a:srgbClr val="1A2026"/>
           </a:solidFill>
           <a:ln/>
         </p:spPr>
@@ -10274,7 +10274,7 @@
     <p:bg>
       <p:bgPr>
         <a:solidFill>
-          <a:srgbClr val="0F1419"/>
+          <a:srgbClr val="0F1214"/>
         </a:solidFill>
       </p:bgPr>
     </p:bg>
@@ -10307,7 +10307,7 @@
             <a:avLst/>
           </a:prstGeom>
           <a:solidFill>
-            <a:srgbClr val="6366F1">
+            <a:srgbClr val="3B968F">
               <a:alpha val="12000"/>
             </a:srgbClr>
           </a:solidFill>
@@ -10365,7 +10365,7 @@
             <a:r>
               <a:rPr lang="en-US" sz="2000" b="1" dirty="0">
                 <a:solidFill>
-                  <a:srgbClr val="6366F1"/>
+                  <a:srgbClr val="3B968F"/>
                 </a:solidFill>
                 <a:latin typeface="Calibri" pitchFamily="34" charset="0"/>
                 <a:ea typeface="Calibri" pitchFamily="34" charset="-122"/>
@@ -10489,7 +10489,7 @@
             <a:r>
               <a:rPr lang="en-US" sz="900" dirty="0">
                 <a:solidFill>
-                  <a:srgbClr val="64748B"/>
+                  <a:srgbClr val="5B6672"/>
                 </a:solidFill>
                 <a:latin typeface="Calibri" pitchFamily="34" charset="0"/>
                 <a:ea typeface="Calibri" pitchFamily="34" charset="-122"/>
@@ -10515,7 +10515,7 @@
     <p:bg>
       <p:bgPr>
         <a:solidFill>
-          <a:srgbClr val="0D2137"/>
+          <a:srgbClr val="12181D"/>
         </a:solidFill>
       </p:bgPr>
     </p:bg>
@@ -10596,7 +10596,7 @@
             <a:avLst/>
           </a:prstGeom>
           <a:solidFill>
-            <a:srgbClr val="6366F1">
+            <a:srgbClr val="3B968F">
               <a:alpha val="6000"/>
             </a:srgbClr>
           </a:solidFill>
@@ -10618,7 +10618,7 @@
             <a:avLst/>
           </a:prstGeom>
           <a:solidFill>
-            <a:srgbClr val="6366F1"/>
+            <a:srgbClr val="3B968F"/>
           </a:solidFill>
           <a:ln/>
         </p:spPr>
@@ -10650,7 +10650,7 @@
             <a:r>
               <a:rPr lang="en-US" sz="1200" b="1" spc="200" kern="0" dirty="0">
                 <a:solidFill>
-                  <a:srgbClr val="6366F1"/>
+                  <a:srgbClr val="3B968F"/>
                 </a:solidFill>
                 <a:latin typeface="Calibri" pitchFamily="34" charset="0"/>
                 <a:ea typeface="Calibri" pitchFamily="34" charset="-122"/>
@@ -10728,7 +10728,7 @@
             <a:r>
               <a:rPr lang="en-US" sz="1100" dirty="0">
                 <a:solidFill>
-                  <a:srgbClr val="64748B"/>
+                  <a:srgbClr val="5B6672"/>
                 </a:solidFill>
                 <a:latin typeface="Calibri" pitchFamily="34" charset="0"/>
                 <a:ea typeface="Calibri" pitchFamily="34" charset="-122"/>
@@ -10754,7 +10754,7 @@
     <p:bg>
       <p:bgPr>
         <a:solidFill>
-          <a:srgbClr val="0F1419"/>
+          <a:srgbClr val="0F1214"/>
         </a:solidFill>
       </p:bgPr>
     </p:bg>
@@ -10787,7 +10787,7 @@
             <a:avLst/>
           </a:prstGeom>
           <a:solidFill>
-            <a:srgbClr val="6366F1">
+            <a:srgbClr val="3B968F">
               <a:alpha val="12000"/>
             </a:srgbClr>
           </a:solidFill>
@@ -10845,7 +10845,7 @@
             <a:r>
               <a:rPr lang="en-US" sz="2000" b="1" dirty="0">
                 <a:solidFill>
-                  <a:srgbClr val="6366F1"/>
+                  <a:srgbClr val="3B968F"/>
                 </a:solidFill>
                 <a:latin typeface="Calibri" pitchFamily="34" charset="0"/>
                 <a:ea typeface="Calibri" pitchFamily="34" charset="-122"/>
@@ -10948,7 +10948,7 @@
             <a:r>
               <a:rPr lang="en-US" sz="900" dirty="0">
                 <a:solidFill>
-                  <a:srgbClr val="64748B"/>
+                  <a:srgbClr val="5B6672"/>
                 </a:solidFill>
                 <a:latin typeface="Calibri" pitchFamily="34" charset="0"/>
                 <a:ea typeface="Calibri" pitchFamily="34" charset="-122"/>
@@ -10974,7 +10974,7 @@
     <p:bg>
       <p:bgPr>
         <a:solidFill>
-          <a:srgbClr val="1A2332"/>
+          <a:srgbClr val="1A2026"/>
         </a:solidFill>
       </p:bgPr>
     </p:bg>
@@ -11043,7 +11043,7 @@
             <a:r>
               <a:rPr lang="en-US" sz="1200" b="1" spc="300" kern="0" dirty="0">
                 <a:solidFill>
-                  <a:srgbClr val="F59E0B"/>
+                  <a:srgbClr val="5BC1B8"/>
                 </a:solidFill>
                 <a:latin typeface="Calibri" pitchFamily="34" charset="0"/>
                 <a:ea typeface="Calibri" pitchFamily="34" charset="-122"/>
@@ -11111,7 +11111,7 @@
             </a:avLst>
           </a:prstGeom>
           <a:solidFill>
-            <a:srgbClr val="0F1419"/>
+            <a:srgbClr val="0F1214"/>
           </a:solidFill>
           <a:ln/>
         </p:spPr>
@@ -11133,7 +11133,7 @@
             </a:avLst>
           </a:prstGeom>
           <a:solidFill>
-            <a:srgbClr val="6366F1"/>
+            <a:srgbClr val="3B968F"/>
           </a:solidFill>
           <a:ln/>
         </p:spPr>
@@ -11147,7 +11147,7 @@
             <a:r>
               <a:rPr lang="en-US" sz="1500" b="1" dirty="0">
                 <a:solidFill>
-                  <a:srgbClr val="0F1419"/>
+                  <a:srgbClr val="0F1214"/>
                 </a:solidFill>
                 <a:latin typeface="Calibri" pitchFamily="34" charset="0"/>
                 <a:ea typeface="Calibri" pitchFamily="34" charset="-122"/>
@@ -11215,7 +11215,7 @@
             </a:avLst>
           </a:prstGeom>
           <a:solidFill>
-            <a:srgbClr val="0F1419"/>
+            <a:srgbClr val="0F1214"/>
           </a:solidFill>
           <a:ln/>
         </p:spPr>
@@ -11237,7 +11237,7 @@
             </a:avLst>
           </a:prstGeom>
           <a:solidFill>
-            <a:srgbClr val="6366F1"/>
+            <a:srgbClr val="3B968F"/>
           </a:solidFill>
           <a:ln/>
         </p:spPr>
@@ -11251,7 +11251,7 @@
             <a:r>
               <a:rPr lang="en-US" sz="1500" b="1" dirty="0">
                 <a:solidFill>
-                  <a:srgbClr val="0F1419"/>
+                  <a:srgbClr val="0F1214"/>
                 </a:solidFill>
                 <a:latin typeface="Calibri" pitchFamily="34" charset="0"/>
                 <a:ea typeface="Calibri" pitchFamily="34" charset="-122"/>
@@ -11319,7 +11319,7 @@
             </a:avLst>
           </a:prstGeom>
           <a:solidFill>
-            <a:srgbClr val="0F1419"/>
+            <a:srgbClr val="0F1214"/>
           </a:solidFill>
           <a:ln/>
         </p:spPr>
@@ -11341,7 +11341,7 @@
             </a:avLst>
           </a:prstGeom>
           <a:solidFill>
-            <a:srgbClr val="6366F1"/>
+            <a:srgbClr val="3B968F"/>
           </a:solidFill>
           <a:ln/>
         </p:spPr>
@@ -11355,7 +11355,7 @@
             <a:r>
               <a:rPr lang="en-US" sz="1500" b="1" dirty="0">
                 <a:solidFill>
-                  <a:srgbClr val="0F1419"/>
+                  <a:srgbClr val="0F1214"/>
                 </a:solidFill>
                 <a:latin typeface="Calibri" pitchFamily="34" charset="0"/>
                 <a:ea typeface="Calibri" pitchFamily="34" charset="-122"/>
@@ -11423,7 +11423,7 @@
             </a:avLst>
           </a:prstGeom>
           <a:solidFill>
-            <a:srgbClr val="0F1419"/>
+            <a:srgbClr val="0F1214"/>
           </a:solidFill>
           <a:ln/>
         </p:spPr>
@@ -11445,7 +11445,7 @@
             </a:avLst>
           </a:prstGeom>
           <a:solidFill>
-            <a:srgbClr val="6366F1"/>
+            <a:srgbClr val="3B968F"/>
           </a:solidFill>
           <a:ln/>
         </p:spPr>
@@ -11459,7 +11459,7 @@
             <a:r>
               <a:rPr lang="en-US" sz="1500" b="1" dirty="0">
                 <a:solidFill>
-                  <a:srgbClr val="0F1419"/>
+                  <a:srgbClr val="0F1214"/>
                 </a:solidFill>
                 <a:latin typeface="Calibri" pitchFamily="34" charset="0"/>
                 <a:ea typeface="Calibri" pitchFamily="34" charset="-122"/>
@@ -11527,7 +11527,7 @@
             </a:avLst>
           </a:prstGeom>
           <a:solidFill>
-            <a:srgbClr val="0F1419"/>
+            <a:srgbClr val="0F1214"/>
           </a:solidFill>
           <a:ln/>
         </p:spPr>
@@ -11549,7 +11549,7 @@
             </a:avLst>
           </a:prstGeom>
           <a:solidFill>
-            <a:srgbClr val="6366F1"/>
+            <a:srgbClr val="3B968F"/>
           </a:solidFill>
           <a:ln/>
         </p:spPr>
@@ -11563,7 +11563,7 @@
             <a:r>
               <a:rPr lang="en-US" sz="1500" b="1" dirty="0">
                 <a:solidFill>
-                  <a:srgbClr val="0F1419"/>
+                  <a:srgbClr val="0F1214"/>
                 </a:solidFill>
                 <a:latin typeface="Calibri" pitchFamily="34" charset="0"/>
                 <a:ea typeface="Calibri" pitchFamily="34" charset="-122"/>
@@ -11628,7 +11628,7 @@
     <p:bg>
       <p:bgPr>
         <a:solidFill>
-          <a:srgbClr val="0F1419"/>
+          <a:srgbClr val="0F1214"/>
         </a:solidFill>
       </p:bgPr>
     </p:bg>
@@ -11663,7 +11663,7 @@
             </a:avLst>
           </a:prstGeom>
           <a:solidFill>
-            <a:srgbClr val="2D1B1B"/>
+            <a:srgbClr val="2A1414"/>
           </a:solidFill>
           <a:ln/>
         </p:spPr>
@@ -11683,7 +11683,7 @@
             <a:avLst/>
           </a:prstGeom>
           <a:solidFill>
-            <a:srgbClr val="EF4444"/>
+            <a:srgbClr val="DC2626"/>
           </a:solidFill>
           <a:ln/>
         </p:spPr>
@@ -11739,7 +11739,7 @@
             <a:r>
               <a:rPr lang="en-US" sz="1200" b="1" spc="300" kern="0" dirty="0">
                 <a:solidFill>
-                  <a:srgbClr val="EF4444"/>
+                  <a:srgbClr val="DC2626"/>
                 </a:solidFill>
                 <a:latin typeface="Calibri" pitchFamily="34" charset="0"/>
                 <a:ea typeface="Calibri" pitchFamily="34" charset="-122"/>
@@ -11850,7 +11850,7 @@
     <p:bg>
       <p:bgPr>
         <a:solidFill>
-          <a:srgbClr val="0F1419"/>
+          <a:srgbClr val="0F1214"/>
         </a:solidFill>
       </p:bgPr>
     </p:bg>
@@ -11883,7 +11883,7 @@
             <a:avLst/>
           </a:prstGeom>
           <a:solidFill>
-            <a:srgbClr val="6366F1">
+            <a:srgbClr val="3B968F">
               <a:alpha val="6000"/>
             </a:srgbClr>
           </a:solidFill>
@@ -11980,7 +11980,7 @@
             <a:r>
               <a:rPr lang="en-US" sz="1300" dirty="0">
                 <a:solidFill>
-                  <a:srgbClr val="94A3B8"/>
+                  <a:srgbClr val="8994A0"/>
                 </a:solidFill>
                 <a:latin typeface="Calibri" pitchFamily="34" charset="0"/>
                 <a:ea typeface="Calibri" pitchFamily="34" charset="-122"/>
@@ -12007,7 +12007,7 @@
             <a:avLst/>
           </a:prstGeom>
           <a:solidFill>
-            <a:srgbClr val="6366F1"/>
+            <a:srgbClr val="3B968F"/>
           </a:solidFill>
           <a:ln/>
         </p:spPr>
@@ -12039,7 +12039,7 @@
             <a:r>
               <a:rPr lang="en-US" sz="1100" spc="300" kern="0" dirty="0">
                 <a:solidFill>
-                  <a:srgbClr val="64748B"/>
+                  <a:srgbClr val="5B6672"/>
                 </a:solidFill>
                 <a:latin typeface="Calibri" pitchFamily="34" charset="0"/>
                 <a:ea typeface="Calibri" pitchFamily="34" charset="-122"/>
@@ -12078,7 +12078,7 @@
             <a:r>
               <a:rPr lang="en-US" sz="1100" dirty="0">
                 <a:solidFill>
-                  <a:srgbClr val="009E8B"/>
+                  <a:srgbClr val="000000"/>
                 </a:solidFill>
                 <a:latin typeface="Calibri" pitchFamily="34" charset="0"/>
                 <a:ea typeface="Calibri" pitchFamily="34" charset="-122"/>
@@ -12104,7 +12104,7 @@
     <p:bg>
       <p:bgPr>
         <a:solidFill>
-          <a:srgbClr val="0F1419"/>
+          <a:srgbClr val="0F1214"/>
         </a:solidFill>
       </p:bgPr>
     </p:bg>
@@ -12137,7 +12137,7 @@
             <a:avLst/>
           </a:prstGeom>
           <a:solidFill>
-            <a:srgbClr val="6366F1">
+            <a:srgbClr val="3B968F">
               <a:alpha val="12000"/>
             </a:srgbClr>
           </a:solidFill>
@@ -12238,7 +12238,7 @@
             <a:r>
               <a:rPr lang="en-US" sz="900" dirty="0">
                 <a:solidFill>
-                  <a:srgbClr val="64748B"/>
+                  <a:srgbClr val="5B6672"/>
                 </a:solidFill>
                 <a:latin typeface="Calibri" pitchFamily="34" charset="0"/>
                 <a:ea typeface="Calibri" pitchFamily="34" charset="-122"/>
@@ -12264,7 +12264,7 @@
     <p:bg>
       <p:bgPr>
         <a:solidFill>
-          <a:srgbClr val="0F1419"/>
+          <a:srgbClr val="0F1214"/>
         </a:solidFill>
       </p:bgPr>
     </p:bg>
@@ -12309,7 +12309,7 @@
             <a:r>
               <a:rPr lang="en-US" sz="2000" b="1" dirty="0">
                 <a:solidFill>
-                  <a:srgbClr val="6366F1"/>
+                  <a:srgbClr val="3B968F"/>
                 </a:solidFill>
                 <a:latin typeface="Calibri" pitchFamily="34" charset="0"/>
                 <a:ea typeface="Calibri" pitchFamily="34" charset="-122"/>
@@ -12423,7 +12423,7 @@
             </a:avLst>
           </a:prstGeom>
           <a:solidFill>
-            <a:srgbClr val="1A2332"/>
+            <a:srgbClr val="1A2026"/>
           </a:solidFill>
           <a:ln/>
         </p:spPr>
@@ -12508,7 +12508,7 @@
             </a:avLst>
           </a:prstGeom>
           <a:solidFill>
-            <a:srgbClr val="1A2332"/>
+            <a:srgbClr val="1A2026"/>
           </a:solidFill>
           <a:ln/>
         </p:spPr>
@@ -12593,7 +12593,7 @@
             </a:avLst>
           </a:prstGeom>
           <a:solidFill>
-            <a:srgbClr val="1A2332"/>
+            <a:srgbClr val="1A2026"/>
           </a:solidFill>
           <a:ln/>
         </p:spPr>
@@ -12675,7 +12675,7 @@
     <p:bg>
       <p:bgPr>
         <a:solidFill>
-          <a:srgbClr val="0F1419"/>
+          <a:srgbClr val="0F1214"/>
         </a:solidFill>
       </p:bgPr>
     </p:bg>
@@ -12708,7 +12708,7 @@
             <a:avLst/>
           </a:prstGeom>
           <a:solidFill>
-            <a:srgbClr val="6366F1">
+            <a:srgbClr val="3B968F">
               <a:alpha val="12000"/>
             </a:srgbClr>
           </a:solidFill>
@@ -12766,7 +12766,7 @@
             <a:r>
               <a:rPr lang="en-US" sz="2000" b="1" dirty="0">
                 <a:solidFill>
-                  <a:srgbClr val="6366F1"/>
+                  <a:srgbClr val="3B968F"/>
                 </a:solidFill>
                 <a:latin typeface="Calibri" pitchFamily="34" charset="0"/>
                 <a:ea typeface="Calibri" pitchFamily="34" charset="-122"/>
@@ -12848,7 +12848,7 @@
             <a:r>
               <a:rPr lang="en-US" sz="900" dirty="0">
                 <a:solidFill>
-                  <a:srgbClr val="64748B"/>
+                  <a:srgbClr val="5B6672"/>
                 </a:solidFill>
                 <a:latin typeface="Calibri" pitchFamily="34" charset="0"/>
                 <a:ea typeface="Calibri" pitchFamily="34" charset="-122"/>
@@ -12874,7 +12874,7 @@
     <p:bg>
       <p:bgPr>
         <a:solidFill>
-          <a:srgbClr val="0F1419"/>
+          <a:srgbClr val="0F1214"/>
         </a:solidFill>
       </p:bgPr>
     </p:bg>
@@ -12907,7 +12907,7 @@
             <a:avLst/>
           </a:prstGeom>
           <a:solidFill>
-            <a:srgbClr val="6366F1">
+            <a:srgbClr val="3B968F">
               <a:alpha val="12000"/>
             </a:srgbClr>
           </a:solidFill>
@@ -12965,7 +12965,7 @@
             <a:r>
               <a:rPr lang="en-US" sz="2000" b="1" dirty="0">
                 <a:solidFill>
-                  <a:srgbClr val="6366F1"/>
+                  <a:srgbClr val="3B968F"/>
                 </a:solidFill>
                 <a:latin typeface="Calibri" pitchFamily="34" charset="0"/>
                 <a:ea typeface="Calibri" pitchFamily="34" charset="-122"/>
@@ -13089,7 +13089,7 @@
             <a:r>
               <a:rPr lang="en-US" sz="900" dirty="0">
                 <a:solidFill>
-                  <a:srgbClr val="64748B"/>
+                  <a:srgbClr val="5B6672"/>
                 </a:solidFill>
                 <a:latin typeface="Calibri" pitchFamily="34" charset="0"/>
                 <a:ea typeface="Calibri" pitchFamily="34" charset="-122"/>
@@ -13115,7 +13115,7 @@
     <p:bg>
       <p:bgPr>
         <a:solidFill>
-          <a:srgbClr val="0F1419"/>
+          <a:srgbClr val="0F1214"/>
         </a:solidFill>
       </p:bgPr>
     </p:bg>
@@ -13148,7 +13148,7 @@
             <a:avLst/>
           </a:prstGeom>
           <a:solidFill>
-            <a:srgbClr val="6366F1">
+            <a:srgbClr val="3B968F">
               <a:alpha val="12000"/>
             </a:srgbClr>
           </a:solidFill>
@@ -13206,7 +13206,7 @@
             <a:r>
               <a:rPr lang="en-US" sz="2000" b="1" dirty="0">
                 <a:solidFill>
-                  <a:srgbClr val="6366F1"/>
+                  <a:srgbClr val="3B968F"/>
                 </a:solidFill>
                 <a:latin typeface="Calibri" pitchFamily="34" charset="0"/>
                 <a:ea typeface="Calibri" pitchFamily="34" charset="-122"/>
@@ -13288,7 +13288,7 @@
             <a:r>
               <a:rPr lang="en-US" sz="900" dirty="0">
                 <a:solidFill>
-                  <a:srgbClr val="64748B"/>
+                  <a:srgbClr val="5B6672"/>
                 </a:solidFill>
                 <a:latin typeface="Calibri" pitchFamily="34" charset="0"/>
                 <a:ea typeface="Calibri" pitchFamily="34" charset="-122"/>
@@ -13314,7 +13314,7 @@
     <p:bg>
       <p:bgPr>
         <a:solidFill>
-          <a:srgbClr val="0F1419"/>
+          <a:srgbClr val="0F1214"/>
         </a:solidFill>
       </p:bgPr>
     </p:bg>
@@ -13359,7 +13359,7 @@
             <a:r>
               <a:rPr lang="en-US" sz="2000" b="1" dirty="0">
                 <a:solidFill>
-                  <a:srgbClr val="6366F1"/>
+                  <a:srgbClr val="3B968F"/>
                 </a:solidFill>
                 <a:latin typeface="Calibri" pitchFamily="34" charset="0"/>
                 <a:ea typeface="Calibri" pitchFamily="34" charset="-122"/>
@@ -13388,7 +13388,7 @@
             </a:avLst>
           </a:prstGeom>
           <a:solidFill>
-            <a:srgbClr val="1A2332"/>
+            <a:srgbClr val="1A2026"/>
           </a:solidFill>
           <a:ln/>
         </p:spPr>
@@ -13483,7 +13483,7 @@
             <a:r>
               <a:rPr lang="en-US" sz="900" dirty="0">
                 <a:solidFill>
-                  <a:srgbClr val="94A3B8"/>
+                  <a:srgbClr val="8994A0"/>
                 </a:solidFill>
                 <a:latin typeface="Calibri" pitchFamily="34" charset="0"/>
                 <a:ea typeface="Calibri" pitchFamily="34" charset="-122"/>
@@ -13512,7 +13512,7 @@
             </a:avLst>
           </a:prstGeom>
           <a:solidFill>
-            <a:srgbClr val="1A2332"/>
+            <a:srgbClr val="1A2026"/>
           </a:solidFill>
           <a:ln/>
         </p:spPr>
@@ -13597,7 +13597,7 @@
             </a:avLst>
           </a:prstGeom>
           <a:solidFill>
-            <a:srgbClr val="1A2332"/>
+            <a:srgbClr val="1A2026"/>
           </a:solidFill>
           <a:ln/>
         </p:spPr>
@@ -13682,7 +13682,7 @@
             </a:avLst>
           </a:prstGeom>
           <a:solidFill>
-            <a:srgbClr val="1A2332"/>
+            <a:srgbClr val="1A2026"/>
           </a:solidFill>
           <a:ln/>
         </p:spPr>
@@ -13767,7 +13767,7 @@
             </a:avLst>
           </a:prstGeom>
           <a:solidFill>
-            <a:srgbClr val="1A2332"/>
+            <a:srgbClr val="1A2026"/>
           </a:solidFill>
           <a:ln/>
         </p:spPr>
@@ -13852,7 +13852,7 @@
             </a:avLst>
           </a:prstGeom>
           <a:solidFill>
-            <a:srgbClr val="1A2332"/>
+            <a:srgbClr val="1A2026"/>
           </a:solidFill>
           <a:ln/>
         </p:spPr>
@@ -13947,7 +13947,7 @@
             <a:r>
               <a:rPr lang="en-US" sz="900" dirty="0">
                 <a:solidFill>
-                  <a:srgbClr val="94A3B8"/>
+                  <a:srgbClr val="8994A0"/>
                 </a:solidFill>
                 <a:latin typeface="Calibri" pitchFamily="34" charset="0"/>
                 <a:ea typeface="Calibri" pitchFamily="34" charset="-122"/>
